--- a/slides.pptx
+++ b/slides.pptx
@@ -3239,7 +3239,7 @@
             </a:pPr>
             <a:r>
               <a:rPr/>
-              <a:t>Are we unsiloed yet? FRED and MaarjAM</a:t>
+              <a:t>Are we unsiloed yet? A “Plain Language” (NSF) Update</a:t>
             </a:r>
           </a:p>
         </p:txBody>
@@ -3259,76 +3259,26 @@
           <a:bodyPr/>
           <a:lstStyle/>
           <a:p>
-            <a:pPr lvl="0"/>
-            <a:r>
-              <a:rPr/>
-              <a:t>FRED/MaarjAM met in person and data (csv, xslx-&gt;csv) was shared in person</a:t>
-            </a:r>
-          </a:p>
-          <a:p>
-            <a:pPr lvl="0"/>
-            <a:r>
-              <a:rPr/>
-              <a:t>FRED/MaarjAM data openly published</a:t>
-            </a:r>
-          </a:p>
-          <a:p>
-            <a:pPr lvl="1"/>
-            <a:r>
-              <a:rPr>
-                <a:hlinkClick r:id="rId2"/>
+            <a:pPr lvl="0" indent="0" marL="1270000">
+              <a:buNone/>
+            </a:pPr>
+            <a:r>
+              <a:rPr sz="2000"/>
+              <a:t>Since the inaugural MicrobeNetNet ([1], MN^N) colloquium in Knoxville, TN 2025-03-20/2025-03-24 [2], Jorrit Poelen has collaborated with many MN^N participants and nodes to use existing methods [3,4] to review and integrate existing datasets, databases, and collections describing plant-microbe interactions into the openly accessible and citable MicrobeNetNet Data Review Corpus [5,6]. The </a:t>
+            </a:r>
+            <a:r>
+              <a:rPr sz="2000" b="1"/>
+              <a:t>2026-08-14 version of the MN^N Review Corpus is a global dataset containing over 7 million claims sourced from MycoPortal (a data portal of a consortium of Mycology Collections), USDA United States National Fungus Collections Fungus-Host Dataset, Microbial Atlas of Predicted Species (MAPS), AusTrait, Fine Root Ecology Database (FRED), MaarjAM, FungalTraits, FunFun, Global(AM)Fungi, International Collection of Microorganisms from Plants (ICMP), MycoDB, USDA ARS Culture Collection (NRRL), and Unite and more.</a:t>
+            </a:r>
+            <a:r>
+              <a:rPr sz="2000"/>
+              <a:t> […] We expect to continue to integrate existing datasets […], but also improve the data infrastructures [7] that help keep this openly data accessible. </a:t>
+            </a:r>
+            <a:r>
+              <a:rPr sz="2000" baseline="30000">
+                <a:hlinkClick r:id="rId2" action="ppaction://hlinksldjump"/>
               </a:rPr>
-              <a:t>https://github.com/globalbioticinteractions/fred</a:t>
-            </a:r>
-          </a:p>
-          <a:p>
-            <a:pPr lvl="1"/>
-            <a:r>
-              <a:rPr>
-                <a:hlinkClick r:id="rId3"/>
-              </a:rPr>
-              <a:t>https://github.com/globalbioticinteractions/maarjam</a:t>
-            </a:r>
-          </a:p>
-          <a:p>
-            <a:pPr lvl="0"/>
-            <a:r>
-              <a:rPr/>
-              <a:t>GloBI integration tools used to connect FRED/MaarjAM via plant taxonomic names (World of Flora Online)</a:t>
-            </a:r>
-          </a:p>
-          <a:p>
-            <a:pPr lvl="0"/>
-            <a:r>
-              <a:rPr/>
-              <a:t>Early applications include GloBI Data Reviews and Plant Overlap Analysis.</a:t>
-            </a:r>
-          </a:p>
-          <a:p>
-            <a:pPr lvl="1"/>
-            <a:r>
-              <a:rPr>
-                <a:hlinkClick r:id="rId4"/>
-              </a:rPr>
-              <a:t>Elton, Nomer, &amp; Preston. (2026). Versioned Archive and Review of Biotic Interactions and Taxon Names Found within globalbioticinteractions/fred hash://md5/6db551793883f575d828d8a600e1af72. Zenodo. https://doi.org/10.5281/zenodo.20547776</a:t>
-            </a:r>
-          </a:p>
-          <a:p>
-            <a:pPr lvl="1"/>
-            <a:r>
-              <a:rPr>
-                <a:hlinkClick r:id="rId5"/>
-              </a:rPr>
-              <a:t>Elton, Nomer, &amp; Preston. (2026). Versioned Archive and Review of Biotic Interactions and Taxon Names Found within globalbioticinteractions/maarjam hash://md5/4578fcd83fceba1f11c269d8aaf1118a. Zenodo. https://doi.org/10.5281/zenodo.20548434</a:t>
-            </a:r>
-          </a:p>
-          <a:p>
-            <a:pPr lvl="1"/>
-            <a:r>
-              <a:rPr>
-                <a:hlinkClick r:id="rId6"/>
-              </a:rPr>
-              <a:t>https://github.com/jhpoelen/fungal-plant-host-overlap/tree/0faeeeae123b5d8f53576feb1d607ffb5d2bd3ac</a:t>
+              <a:t>5</a:t>
             </a:r>
           </a:p>
         </p:txBody>
@@ -3563,14 +3513,14 @@
                 <a:latin typeface="Courier"/>
               </a:rPr>
               <a:t>(You or Your Colleagues)
- -[:curate]-&gt;
-  (Original Data)
-    -[:usedIn]-&gt; 
+  -[:curate]-&gt;
+    (Original Data)
+      -[:usedIn]-&gt; 
        (MNN Data Review)
-          -[:partOf]-&gt; 
-              (MNN Data Review Corpus)
-                -[:usedBy]-&gt;
-                   (... everyone?)</a:t>
+         -[:partOf]-&gt; 
+            (MNN Data Review Corpus)
+               -[:usedBy]-&gt;
+                  (... everyone?)</a:t>
             </a:r>
           </a:p>
         </p:txBody>
@@ -4008,7 +3958,7 @@
             </a:pPr>
             <a:r>
               <a:rPr sz="1800"/>
-              <a:t>3. Excerpt from Jorrit’s update submitted to Ben for NSF report on 2026-08-14</a:t>
+              <a:t>3. Sikes, B., Classen, A., Kivlin, S., Zanne, A.&amp; Holly Andres. (2025, May 29). 2025 MicrobeNet^Net Colloquium. Zenodo. 2025 MicrobeNet^Net Colloquium, Knoxville, TN. https://doi.org/10.5281/zenodo.15547951</a:t>
             </a:r>
           </a:p>
           <a:p>
@@ -4026,7 +3976,7 @@
             </a:pPr>
             <a:r>
               <a:rPr sz="1800"/>
-              <a:t>5. Sikes, B., Classen, A., Kivlin, S., Zanne, A.&amp; Holly Andres. (2025, May 29). 2025 MicrobeNet^Net Colloquium. Zenodo. 2025 MicrobeNet^Net Colloquium, Knoxville, TN. https://doi.org/10.5281/zenodo.15547951</a:t>
+              <a:t>5. Excerpt from Jorrit’s update submitted to Ben for NSF report on 2026-08-14</a:t>
             </a:r>
           </a:p>
           <a:p>
@@ -4356,92 +4306,6 @@
 </file>
 
 <file path=ppt/slides/slide5.xml><?xml version="1.0" encoding="utf-8"?>
-<p:sld xmlns:a="http://schemas.openxmlformats.org/drawingml/2006/main" xmlns:r="http://schemas.openxmlformats.org/officeDocument/2006/relationships" xmlns:p="http://schemas.openxmlformats.org/presentationml/2006/main">
-  <p:cSld>
-    <p:spTree>
-      <p:nvGrpSpPr>
-        <p:cNvPr id="1" name=""/>
-        <p:cNvGrpSpPr/>
-        <p:nvPr/>
-      </p:nvGrpSpPr>
-      <p:grpSpPr>
-        <a:xfrm>
-          <a:off x="0" y="0"/>
-          <a:ext cx="0" cy="0"/>
-          <a:chOff x="0" y="0"/>
-          <a:chExt cx="0" cy="0"/>
-        </a:xfrm>
-      </p:grpSpPr>
-      <p:sp>
-        <p:nvSpPr>
-          <p:cNvPr id="2" name="Title 1"/>
-          <p:cNvSpPr>
-            <a:spLocks noGrp="1"/>
-          </p:cNvSpPr>
-          <p:nvPr>
-            <p:ph type="title"/>
-          </p:nvPr>
-        </p:nvSpPr>
-        <p:spPr/>
-        <p:txBody>
-          <a:bodyPr/>
-          <a:lstStyle/>
-          <a:p>
-            <a:pPr lvl="0" indent="0" marL="0">
-              <a:buNone/>
-            </a:pPr>
-            <a:r>
-              <a:rPr/>
-              <a:t>Are we unsiloed yet? A “Plain Language” (NSF) Update</a:t>
-            </a:r>
-          </a:p>
-        </p:txBody>
-      </p:sp>
-      <p:sp>
-        <p:nvSpPr>
-          <p:cNvPr id="3" name="Content Placeholder 2"/>
-          <p:cNvSpPr>
-            <a:spLocks noGrp="1"/>
-          </p:cNvSpPr>
-          <p:nvPr>
-            <p:ph idx="1"/>
-          </p:nvPr>
-        </p:nvSpPr>
-        <p:spPr/>
-        <p:txBody>
-          <a:bodyPr/>
-          <a:lstStyle/>
-          <a:p>
-            <a:pPr lvl="0" indent="0" marL="1270000">
-              <a:buNone/>
-            </a:pPr>
-            <a:r>
-              <a:rPr sz="2000"/>
-              <a:t>Since the inaugural MicrobeNetNet ([1], MN^N) colloquium in Knoxville, TN 2025-03-20/2025-03-24 [2], Jorrit Poelen has collaborated with many MN^N participants and nodes to use existing methods [3,4] to review and integrate existing datasets, databases, and collections describing plant-microbe interactions into the openly accessible and citable MicrobeNetNet Data Review Corpus [5,6]. The </a:t>
-            </a:r>
-            <a:r>
-              <a:rPr sz="2000" b="1"/>
-              <a:t>2026-08-14 version of the MN^N Review Corpus is a global dataset containing over 7 million claims sourced from MycoPortal (a data portal of a consortium of Mycology Collections), USDA United States National Fungus Collections Fungus-Host Dataset, Microbial Atlas of Predicted Species (MAPS), AusTrait, Fine Root Ecology Database (FRED), MaarjAM, FungalTraits, FunFun, Global(AM)Fungi, International Collection of Microorganisms from Plants (ICMP), MycoDB, USDA ARS Culture Collection (NRRL), and Unite and more.</a:t>
-            </a:r>
-            <a:r>
-              <a:rPr sz="2000"/>
-              <a:t> […] We expect to continue to integrate existing datasets […], but also improve the data infrastructures [7] that help keep this openly data accessible. </a:t>
-            </a:r>
-            <a:r>
-              <a:rPr sz="2000" baseline="30000">
-                <a:hlinkClick r:id="rId2" action="ppaction://hlinksldjump"/>
-              </a:rPr>
-              <a:t>3</a:t>
-            </a:r>
-          </a:p>
-        </p:txBody>
-      </p:sp>
-    </p:spTree>
-  </p:cSld>
-</p:sld>
-</file>
-
-<file path=ppt/slides/slide6.xml><?xml version="1.0" encoding="utf-8"?>
 <p:sld xmlns:a="http://schemas.openxmlformats.org/drawingml/2006/main" xmlns:r="http://schemas.openxmlformats.org/officeDocument/2006/relationships" xmlns:p="http://schemas.openxmlformats.org/presentationml/2006/main">
   <p:cSld>
     <p:spTree>
@@ -4548,7 +4412,7 @@
 </p:sld>
 </file>
 
-<file path=ppt/slides/slide7.xml><?xml version="1.0" encoding="utf-8"?>
+<file path=ppt/slides/slide6.xml><?xml version="1.0" encoding="utf-8"?>
 <p:sld xmlns:a="http://schemas.openxmlformats.org/drawingml/2006/main" xmlns:r="http://schemas.openxmlformats.org/officeDocument/2006/relationships" xmlns:p="http://schemas.openxmlformats.org/presentationml/2006/main">
   <p:cSld>
     <p:spTree>
@@ -4591,7 +4455,7 @@
               <a:rPr baseline="30000">
                 <a:hlinkClick r:id="rId2" action="ppaction://hlinksldjump"/>
               </a:rPr>
-              <a:t>4</a:t>
+              <a:t>3</a:t>
             </a:r>
             <a:r>
               <a:rPr/>
@@ -4605,7 +4469,7 @@
 </p:sld>
 </file>
 
-<file path=ppt/slides/slide8.xml><?xml version="1.0" encoding="utf-8"?>
+<file path=ppt/slides/slide7.xml><?xml version="1.0" encoding="utf-8"?>
 <p:sld xmlns:a="http://schemas.openxmlformats.org/drawingml/2006/main" xmlns:r="http://schemas.openxmlformats.org/officeDocument/2006/relationships" xmlns:p="http://schemas.openxmlformats.org/presentationml/2006/main">
   <p:cSld>
     <p:spTree>
@@ -4712,6 +4576,63 @@
 </p:sld>
 </file>
 
+<file path=ppt/slides/slide8.xml><?xml version="1.0" encoding="utf-8"?>
+<p:sld xmlns:a="http://schemas.openxmlformats.org/drawingml/2006/main" xmlns:r="http://schemas.openxmlformats.org/officeDocument/2006/relationships" xmlns:p="http://schemas.openxmlformats.org/presentationml/2006/main">
+  <p:cSld>
+    <p:spTree>
+      <p:nvGrpSpPr>
+        <p:cNvPr id="1" name=""/>
+        <p:cNvGrpSpPr/>
+        <p:nvPr/>
+      </p:nvGrpSpPr>
+      <p:grpSpPr>
+        <a:xfrm>
+          <a:off x="0" y="0"/>
+          <a:ext cx="0" cy="0"/>
+          <a:chOff x="0" y="0"/>
+          <a:chExt cx="0" cy="0"/>
+        </a:xfrm>
+      </p:grpSpPr>
+      <p:sp>
+        <p:nvSpPr>
+          <p:cNvPr id="3" name="Content Placeholder 2"/>
+          <p:cNvSpPr>
+            <a:spLocks noGrp="1"/>
+          </p:cNvSpPr>
+          <p:nvPr>
+            <p:ph idx="1"/>
+          </p:nvPr>
+        </p:nvSpPr>
+        <p:spPr/>
+        <p:txBody>
+          <a:bodyPr/>
+          <a:lstStyle/>
+          <a:p>
+            <a:pPr lvl="0" indent="0" marL="0">
+              <a:buNone/>
+            </a:pPr>
+            <a:r>
+              <a:rPr/>
+              <a:t> </a:t>
+            </a:r>
+            <a:r>
+              <a:rPr baseline="30000">
+                <a:hlinkClick r:id="rId2" action="ppaction://hlinksldjump"/>
+              </a:rPr>
+              <a:t>4</a:t>
+            </a:r>
+            <a:r>
+              <a:rPr/>
+              <a:t>.</a:t>
+            </a:r>
+          </a:p>
+        </p:txBody>
+      </p:sp>
+    </p:spTree>
+  </p:cSld>
+</p:sld>
+</file>
+
 <file path=ppt/slides/slide9.xml><?xml version="1.0" encoding="utf-8"?>
 <p:sld xmlns:a="http://schemas.openxmlformats.org/drawingml/2006/main" xmlns:r="http://schemas.openxmlformats.org/officeDocument/2006/relationships" xmlns:p="http://schemas.openxmlformats.org/presentationml/2006/main">
   <p:cSld>
@@ -4731,6 +4652,31 @@
       </p:grpSpPr>
       <p:sp>
         <p:nvSpPr>
+          <p:cNvPr id="2" name="Title 1"/>
+          <p:cNvSpPr>
+            <a:spLocks noGrp="1"/>
+          </p:cNvSpPr>
+          <p:nvPr>
+            <p:ph type="title"/>
+          </p:nvPr>
+        </p:nvSpPr>
+        <p:spPr/>
+        <p:txBody>
+          <a:bodyPr/>
+          <a:lstStyle/>
+          <a:p>
+            <a:pPr lvl="0" indent="0" marL="0">
+              <a:buNone/>
+            </a:pPr>
+            <a:r>
+              <a:rPr/>
+              <a:t>Are we unsiloed yet? FRED and MaarjAM</a:t>
+            </a:r>
+          </a:p>
+        </p:txBody>
+      </p:sp>
+      <p:sp>
+        <p:nvSpPr>
           <p:cNvPr id="3" name="Content Placeholder 2"/>
           <p:cNvSpPr>
             <a:spLocks noGrp="1"/>
@@ -4744,22 +4690,76 @@
           <a:bodyPr/>
           <a:lstStyle/>
           <a:p>
-            <a:pPr lvl="0" indent="0" marL="0">
-              <a:buNone/>
-            </a:pPr>
+            <a:pPr lvl="0"/>
             <a:r>
               <a:rPr/>
-              <a:t> </a:t>
-            </a:r>
-            <a:r>
-              <a:rPr baseline="30000">
-                <a:hlinkClick r:id="rId2" action="ppaction://hlinksldjump"/>
+              <a:t>FRED/MaarjAM met in person and data (csv, xslx-&gt;csv) was shared in person</a:t>
+            </a:r>
+          </a:p>
+          <a:p>
+            <a:pPr lvl="0"/>
+            <a:r>
+              <a:rPr/>
+              <a:t>FRED/MaarjAM data openly published</a:t>
+            </a:r>
+          </a:p>
+          <a:p>
+            <a:pPr lvl="1"/>
+            <a:r>
+              <a:rPr>
+                <a:hlinkClick r:id="rId2"/>
               </a:rPr>
-              <a:t>5</a:t>
-            </a:r>
+              <a:t>https://github.com/globalbioticinteractions/fred</a:t>
+            </a:r>
+          </a:p>
+          <a:p>
+            <a:pPr lvl="1"/>
+            <a:r>
+              <a:rPr>
+                <a:hlinkClick r:id="rId3"/>
+              </a:rPr>
+              <a:t>https://github.com/globalbioticinteractions/maarjam</a:t>
+            </a:r>
+          </a:p>
+          <a:p>
+            <a:pPr lvl="0"/>
             <a:r>
               <a:rPr/>
-              <a:t>.</a:t>
+              <a:t>GloBI integration tools used to connect FRED/MaarjAM via plant taxonomic names (World of Flora Online)</a:t>
+            </a:r>
+          </a:p>
+          <a:p>
+            <a:pPr lvl="0"/>
+            <a:r>
+              <a:rPr/>
+              <a:t>Early applications include GloBI Data Reviews and Plant Overlap Analysis.</a:t>
+            </a:r>
+          </a:p>
+          <a:p>
+            <a:pPr lvl="1"/>
+            <a:r>
+              <a:rPr>
+                <a:hlinkClick r:id="rId4"/>
+              </a:rPr>
+              <a:t>Elton, Nomer, &amp; Preston. (2026). Versioned Archive and Review of Biotic Interactions and Taxon Names Found within globalbioticinteractions/fred hash://md5/6db551793883f575d828d8a600e1af72. Zenodo. https://doi.org/10.5281/zenodo.20547776</a:t>
+            </a:r>
+          </a:p>
+          <a:p>
+            <a:pPr lvl="1"/>
+            <a:r>
+              <a:rPr>
+                <a:hlinkClick r:id="rId5"/>
+              </a:rPr>
+              <a:t>Elton, Nomer, &amp; Preston. (2026). Versioned Archive and Review of Biotic Interactions and Taxon Names Found within globalbioticinteractions/maarjam hash://md5/4578fcd83fceba1f11c269d8aaf1118a. Zenodo. https://doi.org/10.5281/zenodo.20548434</a:t>
+            </a:r>
+          </a:p>
+          <a:p>
+            <a:pPr lvl="1"/>
+            <a:r>
+              <a:rPr>
+                <a:hlinkClick r:id="rId6"/>
+              </a:rPr>
+              <a:t>https://github.com/jhpoelen/fungal-plant-host-overlap/tree/0faeeeae123b5d8f53576feb1d607ffb5d2bd3ac</a:t>
             </a:r>
           </a:p>
         </p:txBody>

--- a/slides.pptx
+++ b/slides.pptx
@@ -22,6 +22,8 @@
     <p:sldId id="270" r:id="rId16"/>
     <p:sldId id="271" r:id="rId17"/>
     <p:sldId id="272" r:id="rId18"/>
+    <p:sldId id="273" r:id="rId19"/>
+    <p:sldId id="274" r:id="rId20"/>
   </p:sldIdLst>
   <p:sldSz cx="9144000" cy="5143500" type="screen16x9"/>
   <p:notesSz cx="6858000" cy="9144000"/>
@@ -3221,12 +3223,12 @@
       </p:grpSpPr>
       <p:sp>
         <p:nvSpPr>
-          <p:cNvPr id="2" name="Title 1"/>
-          <p:cNvSpPr>
-            <a:spLocks noGrp="1"/>
-          </p:cNvSpPr>
-          <p:nvPr>
-            <p:ph type="title"/>
+          <p:cNvPr id="3" name="Content Placeholder 2"/>
+          <p:cNvSpPr>
+            <a:spLocks noGrp="1"/>
+          </p:cNvSpPr>
+          <p:nvPr>
+            <p:ph idx="1"/>
           </p:nvPr>
         </p:nvSpPr>
         <p:spPr/>
@@ -3239,46 +3241,17 @@
             </a:pPr>
             <a:r>
               <a:rPr/>
-              <a:t>Are we unsiloed yet? A “Plain Language” (NSF) Update</a:t>
-            </a:r>
-          </a:p>
-        </p:txBody>
-      </p:sp>
-      <p:sp>
-        <p:nvSpPr>
-          <p:cNvPr id="3" name="Content Placeholder 2"/>
-          <p:cNvSpPr>
-            <a:spLocks noGrp="1"/>
-          </p:cNvSpPr>
-          <p:nvPr>
-            <p:ph idx="1"/>
-          </p:nvPr>
-        </p:nvSpPr>
-        <p:spPr/>
-        <p:txBody>
-          <a:bodyPr/>
-          <a:lstStyle/>
-          <a:p>
-            <a:pPr lvl="0" indent="0" marL="1270000">
-              <a:buNone/>
-            </a:pPr>
-            <a:r>
-              <a:rPr sz="2000"/>
-              <a:t>Since the inaugural MicrobeNetNet ([1], MN^N) colloquium in Knoxville, TN 2025-03-20/2025-03-24 [2], Jorrit Poelen has collaborated with many MN^N participants and nodes to use existing methods [3,4] to review and integrate existing datasets, databases, and collections describing plant-microbe interactions into the openly accessible and citable MicrobeNetNet Data Review Corpus [5,6]. The </a:t>
-            </a:r>
-            <a:r>
-              <a:rPr sz="2000" b="1"/>
-              <a:t>2026-08-14 version of the MN^N Review Corpus is a global dataset containing over 7 million claims sourced from MycoPortal (a data portal of a consortium of Mycology Collections), USDA United States National Fungus Collections Fungus-Host Dataset, Microbial Atlas of Predicted Species (MAPS), AusTrait, Fine Root Ecology Database (FRED), MaarjAM, FungalTraits, FunFun, Global(AM)Fungi, International Collection of Microorganisms from Plants (ICMP), MycoDB, USDA ARS Culture Collection (NRRL), and Unite and more.</a:t>
-            </a:r>
-            <a:r>
-              <a:rPr sz="2000"/>
-              <a:t> […] We expect to continue to integrate existing datasets […], but also improve the data infrastructures [7] that help keep this openly data accessible. </a:t>
-            </a:r>
-            <a:r>
-              <a:rPr sz="2000" baseline="30000">
+              <a:t> </a:t>
+            </a:r>
+            <a:r>
+              <a:rPr baseline="30000">
                 <a:hlinkClick r:id="rId2" action="ppaction://hlinksldjump"/>
               </a:rPr>
-              <a:t>5</a:t>
+              <a:t>4</a:t>
+            </a:r>
+            <a:r>
+              <a:rPr/>
+              <a:t>.</a:t>
             </a:r>
           </a:p>
         </p:txBody>
@@ -3289,6 +3262,228 @@
 </file>
 
 <file path=ppt/slides/slide11.xml><?xml version="1.0" encoding="utf-8"?>
+<p:sld xmlns:a="http://schemas.openxmlformats.org/drawingml/2006/main" xmlns:r="http://schemas.openxmlformats.org/officeDocument/2006/relationships" xmlns:p="http://schemas.openxmlformats.org/presentationml/2006/main">
+  <p:cSld>
+    <p:spTree>
+      <p:nvGrpSpPr>
+        <p:cNvPr id="1" name=""/>
+        <p:cNvGrpSpPr/>
+        <p:nvPr/>
+      </p:nvGrpSpPr>
+      <p:grpSpPr>
+        <a:xfrm>
+          <a:off x="0" y="0"/>
+          <a:ext cx="0" cy="0"/>
+          <a:chOff x="0" y="0"/>
+          <a:chExt cx="0" cy="0"/>
+        </a:xfrm>
+      </p:grpSpPr>
+      <p:sp>
+        <p:nvSpPr>
+          <p:cNvPr id="2" name="Title 1"/>
+          <p:cNvSpPr>
+            <a:spLocks noGrp="1"/>
+          </p:cNvSpPr>
+          <p:nvPr>
+            <p:ph type="title"/>
+          </p:nvPr>
+        </p:nvSpPr>
+        <p:spPr/>
+        <p:txBody>
+          <a:bodyPr/>
+          <a:lstStyle/>
+          <a:p>
+            <a:pPr lvl="0" indent="0" marL="0">
+              <a:buNone/>
+            </a:pPr>
+            <a:r>
+              <a:rPr/>
+              <a:t>Are we unsiloed yet? FRED and MaarjAM</a:t>
+            </a:r>
+          </a:p>
+        </p:txBody>
+      </p:sp>
+      <p:sp>
+        <p:nvSpPr>
+          <p:cNvPr id="3" name="Content Placeholder 2"/>
+          <p:cNvSpPr>
+            <a:spLocks noGrp="1"/>
+          </p:cNvSpPr>
+          <p:nvPr>
+            <p:ph idx="1"/>
+          </p:nvPr>
+        </p:nvSpPr>
+        <p:spPr/>
+        <p:txBody>
+          <a:bodyPr/>
+          <a:lstStyle/>
+          <a:p>
+            <a:pPr lvl="0"/>
+            <a:r>
+              <a:rPr/>
+              <a:t>FRED/MaarjAM met in person and data (csv, xslx-&gt;csv) was shared in person</a:t>
+            </a:r>
+          </a:p>
+          <a:p>
+            <a:pPr lvl="0"/>
+            <a:r>
+              <a:rPr/>
+              <a:t>FRED/MaarjAM data openly published</a:t>
+            </a:r>
+          </a:p>
+          <a:p>
+            <a:pPr lvl="1"/>
+            <a:r>
+              <a:rPr>
+                <a:hlinkClick r:id="rId2"/>
+              </a:rPr>
+              <a:t>https://github.com/globalbioticinteractions/fred</a:t>
+            </a:r>
+          </a:p>
+          <a:p>
+            <a:pPr lvl="1"/>
+            <a:r>
+              <a:rPr>
+                <a:hlinkClick r:id="rId3"/>
+              </a:rPr>
+              <a:t>https://github.com/globalbioticinteractions/maarjam</a:t>
+            </a:r>
+          </a:p>
+          <a:p>
+            <a:pPr lvl="0"/>
+            <a:r>
+              <a:rPr/>
+              <a:t>GloBI integration tools used to connect FRED/MaarjAM via plant taxonomic names (World of Flora Online)</a:t>
+            </a:r>
+          </a:p>
+          <a:p>
+            <a:pPr lvl="0"/>
+            <a:r>
+              <a:rPr/>
+              <a:t>Early applications include GloBI Data Reviews and Plant Overlap Analysis.</a:t>
+            </a:r>
+          </a:p>
+          <a:p>
+            <a:pPr lvl="1"/>
+            <a:r>
+              <a:rPr>
+                <a:hlinkClick r:id="rId4"/>
+              </a:rPr>
+              <a:t>Elton, Nomer, &amp; Preston. (2026). Versioned Archive and Review of Biotic Interactions and Taxon Names Found within globalbioticinteractions/fred hash://md5/6db551793883f575d828d8a600e1af72. Zenodo. https://doi.org/10.5281/zenodo.20547776</a:t>
+            </a:r>
+          </a:p>
+          <a:p>
+            <a:pPr lvl="1"/>
+            <a:r>
+              <a:rPr>
+                <a:hlinkClick r:id="rId5"/>
+              </a:rPr>
+              <a:t>Elton, Nomer, &amp; Preston. (2026). Versioned Archive and Review of Biotic Interactions and Taxon Names Found within globalbioticinteractions/maarjam hash://md5/4578fcd83fceba1f11c269d8aaf1118a. Zenodo. https://doi.org/10.5281/zenodo.20548434</a:t>
+            </a:r>
+          </a:p>
+          <a:p>
+            <a:pPr lvl="1"/>
+            <a:r>
+              <a:rPr>
+                <a:hlinkClick r:id="rId6"/>
+              </a:rPr>
+              <a:t>https://github.com/jhpoelen/fungal-plant-host-overlap/tree/0faeeeae123b5d8f53576feb1d607ffb5d2bd3ac</a:t>
+            </a:r>
+          </a:p>
+        </p:txBody>
+      </p:sp>
+    </p:spTree>
+  </p:cSld>
+</p:sld>
+</file>
+
+<file path=ppt/slides/slide12.xml><?xml version="1.0" encoding="utf-8"?>
+<p:sld xmlns:a="http://schemas.openxmlformats.org/drawingml/2006/main" xmlns:r="http://schemas.openxmlformats.org/officeDocument/2006/relationships" xmlns:p="http://schemas.openxmlformats.org/presentationml/2006/main">
+  <p:cSld>
+    <p:spTree>
+      <p:nvGrpSpPr>
+        <p:cNvPr id="1" name=""/>
+        <p:cNvGrpSpPr/>
+        <p:nvPr/>
+      </p:nvGrpSpPr>
+      <p:grpSpPr>
+        <a:xfrm>
+          <a:off x="0" y="0"/>
+          <a:ext cx="0" cy="0"/>
+          <a:chOff x="0" y="0"/>
+          <a:chExt cx="0" cy="0"/>
+        </a:xfrm>
+      </p:grpSpPr>
+      <p:sp>
+        <p:nvSpPr>
+          <p:cNvPr id="2" name="Title 1"/>
+          <p:cNvSpPr>
+            <a:spLocks noGrp="1"/>
+          </p:cNvSpPr>
+          <p:nvPr>
+            <p:ph type="title"/>
+          </p:nvPr>
+        </p:nvSpPr>
+        <p:spPr/>
+        <p:txBody>
+          <a:bodyPr/>
+          <a:lstStyle/>
+          <a:p>
+            <a:pPr lvl="0" indent="0" marL="0">
+              <a:buNone/>
+            </a:pPr>
+            <a:r>
+              <a:rPr/>
+              <a:t>Are we unsiloed yet? A “Plain Language” (NSF) Update</a:t>
+            </a:r>
+          </a:p>
+        </p:txBody>
+      </p:sp>
+      <p:sp>
+        <p:nvSpPr>
+          <p:cNvPr id="3" name="Content Placeholder 2"/>
+          <p:cNvSpPr>
+            <a:spLocks noGrp="1"/>
+          </p:cNvSpPr>
+          <p:nvPr>
+            <p:ph idx="1"/>
+          </p:nvPr>
+        </p:nvSpPr>
+        <p:spPr/>
+        <p:txBody>
+          <a:bodyPr/>
+          <a:lstStyle/>
+          <a:p>
+            <a:pPr lvl="0" indent="0" marL="1270000">
+              <a:buNone/>
+            </a:pPr>
+            <a:r>
+              <a:rPr sz="2000"/>
+              <a:t>Since the inaugural MicrobeNetNet ([1], MN^N) colloquium in Knoxville, TN 2025-03-20/2025-03-24 [2], Jorrit Poelen has collaborated with many MN^N participants and nodes to use existing methods [3,4] to review and integrate existing datasets, databases, and collections describing plant-microbe interactions into the openly accessible and citable MicrobeNetNet Data Review Corpus [5,6]. The </a:t>
+            </a:r>
+            <a:r>
+              <a:rPr sz="2000" b="1"/>
+              <a:t>2026-08-14 version of the MN^N Review Corpus is a global dataset containing over 7 million claims sourced from MycoPortal (a data portal of a consortium of Mycology Collections), USDA United States National Fungus Collections Fungus-Host Dataset, Microbial Atlas of Predicted Species (MAPS), AusTrait, Fine Root Ecology Database (FRED), MaarjAM, FungalTraits, FunFun, Global(AM)Fungi, International Collection of Microorganisms from Plants (ICMP), MycoDB, USDA ARS Culture Collection (NRRL), and Unite and more.</a:t>
+            </a:r>
+            <a:r>
+              <a:rPr sz="2000"/>
+              <a:t> […] We expect to continue to integrate existing datasets […], but also improve the data infrastructures [7] that help keep this openly data accessible. </a:t>
+            </a:r>
+            <a:r>
+              <a:rPr sz="2000" baseline="30000">
+                <a:hlinkClick r:id="rId2" action="ppaction://hlinksldjump"/>
+              </a:rPr>
+              <a:t>5</a:t>
+            </a:r>
+          </a:p>
+        </p:txBody>
+      </p:sp>
+    </p:spTree>
+  </p:cSld>
+</p:sld>
+</file>
+
+<file path=ppt/slides/slide13.xml><?xml version="1.0" encoding="utf-8"?>
 <p:sld xmlns:a="http://schemas.openxmlformats.org/drawingml/2006/main" xmlns:r="http://schemas.openxmlformats.org/officeDocument/2006/relationships" xmlns:p="http://schemas.openxmlformats.org/presentationml/2006/main">
   <p:cSld>
     <p:spTree>
@@ -3395,7 +3590,7 @@
 </p:sld>
 </file>
 
-<file path=ppt/slides/slide12.xml><?xml version="1.0" encoding="utf-8"?>
+<file path=ppt/slides/slide14.xml><?xml version="1.0" encoding="utf-8"?>
 <p:sld xmlns:a="http://schemas.openxmlformats.org/drawingml/2006/main" xmlns:r="http://schemas.openxmlformats.org/officeDocument/2006/relationships" xmlns:p="http://schemas.openxmlformats.org/presentationml/2006/main">
   <p:cSld>
     <p:spTree>
@@ -3448,7 +3643,7 @@
 </p:sld>
 </file>
 
-<file path=ppt/slides/slide13.xml><?xml version="1.0" encoding="utf-8"?>
+<file path=ppt/slides/slide15.xml><?xml version="1.0" encoding="utf-8"?>
 <p:sld xmlns:a="http://schemas.openxmlformats.org/drawingml/2006/main" xmlns:r="http://schemas.openxmlformats.org/officeDocument/2006/relationships" xmlns:p="http://schemas.openxmlformats.org/presentationml/2006/main">
   <p:cSld>
     <p:spTree>
@@ -3530,7 +3725,7 @@
 </p:sld>
 </file>
 
-<file path=ppt/slides/slide14.xml><?xml version="1.0" encoding="utf-8"?>
+<file path=ppt/slides/slide16.xml><?xml version="1.0" encoding="utf-8"?>
 <p:sld xmlns:a="http://schemas.openxmlformats.org/drawingml/2006/main" xmlns:r="http://schemas.openxmlformats.org/officeDocument/2006/relationships" xmlns:p="http://schemas.openxmlformats.org/presentationml/2006/main">
   <p:cSld>
     <p:spTree>
@@ -3637,7 +3832,7 @@
 </p:sld>
 </file>
 
-<file path=ppt/slides/slide15.xml><?xml version="1.0" encoding="utf-8"?>
+<file path=ppt/slides/slide17.xml><?xml version="1.0" encoding="utf-8"?>
 <p:sld xmlns:a="http://schemas.openxmlformats.org/drawingml/2006/main" xmlns:r="http://schemas.openxmlformats.org/officeDocument/2006/relationships" xmlns:p="http://schemas.openxmlformats.org/presentationml/2006/main">
   <p:cSld>
     <p:spTree>
@@ -3752,7 +3947,7 @@
 </p:sld>
 </file>
 
-<file path=ppt/slides/slide16.xml><?xml version="1.0" encoding="utf-8"?>
+<file path=ppt/slides/slide18.xml><?xml version="1.0" encoding="utf-8"?>
 <p:sld xmlns:a="http://schemas.openxmlformats.org/drawingml/2006/main" xmlns:r="http://schemas.openxmlformats.org/officeDocument/2006/relationships" xmlns:p="http://schemas.openxmlformats.org/presentationml/2006/main">
   <p:cSld>
     <p:spTree>
@@ -3878,7 +4073,7 @@
 </p:sld>
 </file>
 
-<file path=ppt/slides/slide17.xml><?xml version="1.0" encoding="utf-8"?>
+<file path=ppt/slides/slide19.xml><?xml version="1.0" encoding="utf-8"?>
 <p:sld xmlns:a="http://schemas.openxmlformats.org/drawingml/2006/main" xmlns:r="http://schemas.openxmlformats.org/officeDocument/2006/relationships" xmlns:p="http://schemas.openxmlformats.org/presentationml/2006/main">
   <p:cSld>
     <p:spTree>
@@ -4012,99 +4207,36 @@
           <a:chExt cx="0" cy="0"/>
         </a:xfrm>
       </p:grpSpPr>
-      <p:sp>
-        <p:nvSpPr>
-          <p:cNvPr id="2" name="Title 1"/>
-          <p:cNvSpPr>
-            <a:spLocks noGrp="1"/>
-          </p:cNvSpPr>
-          <p:nvPr>
-            <p:ph type="title"/>
-          </p:nvPr>
-        </p:nvSpPr>
-        <p:spPr/>
-        <p:txBody>
-          <a:bodyPr/>
-          <a:lstStyle/>
-          <a:p>
-            <a:pPr lvl="0" indent="0" marL="0">
-              <a:buNone/>
-            </a:pPr>
-            <a:r>
-              <a:rPr/>
-              <a:t>Guiding Questions</a:t>
-            </a:r>
-          </a:p>
-        </p:txBody>
-      </p:sp>
-      <p:sp>
-        <p:nvSpPr>
-          <p:cNvPr id="3" name="Content Placeholder 2"/>
-          <p:cNvSpPr>
-            <a:spLocks noGrp="1"/>
-          </p:cNvSpPr>
-          <p:nvPr>
-            <p:ph idx="1"/>
-          </p:nvPr>
-        </p:nvSpPr>
-        <p:spPr/>
-        <p:txBody>
-          <a:bodyPr/>
-          <a:lstStyle/>
-          <a:p>
-            <a:pPr lvl="0" indent="0" marL="0">
-              <a:spcBef>
-                <a:spcPts val="3000"/>
-              </a:spcBef>
-              <a:buNone/>
-            </a:pPr>
-            <a:r>
-              <a:rPr b="1"/>
-              <a:t>Hey, are we unsiloed yet?</a:t>
-            </a:r>
-          </a:p>
-          <a:p>
-            <a:pPr lvl="0" indent="0" marL="0">
-              <a:spcBef>
-                <a:spcPts val="3000"/>
-              </a:spcBef>
-              <a:buNone/>
-            </a:pPr>
-            <a:r>
-              <a:rPr b="1"/>
-              <a:t>Do </a:t>
-            </a:r>
-            <a:r>
-              <a:rPr b="1" i="1"/>
-              <a:t>you</a:t>
-            </a:r>
-            <a:r>
-              <a:rPr b="1"/>
-              <a:t> have examples of unsilo-ing?</a:t>
-            </a:r>
-          </a:p>
-          <a:p>
-            <a:pPr lvl="0" indent="0" marL="0">
-              <a:spcBef>
-                <a:spcPts val="3000"/>
-              </a:spcBef>
-              <a:buNone/>
-            </a:pPr>
-            <a:r>
-              <a:rPr b="1"/>
-              <a:t>How do </a:t>
-            </a:r>
-            <a:r>
-              <a:rPr b="1" i="1"/>
-              <a:t>you</a:t>
-            </a:r>
-            <a:r>
-              <a:rPr b="1"/>
-              <a:t> think we should unsilo?</a:t>
-            </a:r>
-          </a:p>
-        </p:txBody>
-      </p:sp>
+      <p:pic>
+        <p:nvPicPr>
+          <p:cNvPr descr="https://creativecommons.org/wp-content/themes/vocabulary-theme/vocabulary/svg/cc/license_badges/big/by.svg" id="0" name="Picture 1"/>
+          <p:cNvPicPr>
+            <a:picLocks noGrp="1" noChangeAspect="1"/>
+          </p:cNvPicPr>
+          <p:nvPr/>
+        </p:nvPicPr>
+        <p:blipFill>
+          <a:blip r:embed="rId2"/>
+          <a:stretch>
+            <a:fillRect/>
+          </a:stretch>
+        </p:blipFill>
+        <p:spPr bwMode="auto">
+          <a:xfrm>
+            <a:off x="2032000" y="1193800"/>
+            <a:ext cx="5080000" cy="3390900"/>
+          </a:xfrm>
+          <a:prstGeom prst="rect">
+            <a:avLst/>
+          </a:prstGeom>
+          <a:noFill/>
+          <a:ln w="9525">
+            <a:noFill/>
+            <a:headEnd/>
+            <a:tailEnd/>
+          </a:ln>
+        </p:spPr>
+      </p:pic>
     </p:spTree>
   </p:cSld>
 </p:sld>
@@ -4129,12 +4261,12 @@
       </p:grpSpPr>
       <p:sp>
         <p:nvSpPr>
-          <p:cNvPr id="2" name="Title 1"/>
-          <p:cNvSpPr>
-            <a:spLocks noGrp="1"/>
-          </p:cNvSpPr>
-          <p:nvPr>
-            <p:ph type="title"/>
+          <p:cNvPr id="3" name="Content Placeholder 2"/>
+          <p:cNvSpPr>
+            <a:spLocks noGrp="1"/>
+          </p:cNvSpPr>
+          <p:nvPr>
+            <p:ph idx="1"/>
           </p:nvPr>
         </p:nvSpPr>
         <p:spPr/>
@@ -4146,66 +4278,10 @@
               <a:buNone/>
             </a:pPr>
             <a:r>
-              <a:rPr/>
-              <a:t>Ben’s Challenge to Jorrit</a:t>
-            </a:r>
-          </a:p>
-        </p:txBody>
-      </p:sp>
-      <p:sp>
-        <p:nvSpPr>
-          <p:cNvPr id="3" name="Content Placeholder 2"/>
-          <p:cNvSpPr>
-            <a:spLocks noGrp="1"/>
-          </p:cNvSpPr>
-          <p:nvPr>
-            <p:ph idx="1"/>
-          </p:nvPr>
-        </p:nvSpPr>
-        <p:spPr/>
-        <p:txBody>
-          <a:bodyPr/>
-          <a:lstStyle/>
-          <a:p>
-            <a:pPr lvl="0" indent="0" marL="1270000">
-              <a:buNone/>
-            </a:pPr>
-            <a:r>
-              <a:rPr sz="2000"/>
-              <a:t>[…] New Datasets/Nodes/Networks that might be connected (Jorrit)</a:t>
-            </a:r>
-          </a:p>
-          <a:p>
-            <a:pPr lvl="0" indent="-342900" marL="342900">
-              <a:buAutoNum type="arabicPeriod"/>
-            </a:pPr>
-            <a:r>
-              <a:rPr sz="2000"/>
-              <a:t>What data are there (plain language summaries)?</a:t>
-            </a:r>
-          </a:p>
-          <a:p>
-            <a:pPr lvl="0" indent="-342900" marL="342900">
-              <a:buAutoNum type="arabicPeriod"/>
-            </a:pPr>
-            <a:r>
-              <a:rPr sz="2000"/>
-              <a:t>How can people access what are there?</a:t>
-            </a:r>
-          </a:p>
-          <a:p>
-            <a:pPr lvl="0" indent="-342900" marL="342900">
-              <a:buAutoNum type="arabicPeriod"/>
-            </a:pPr>
-            <a:r>
-              <a:rPr sz="2000"/>
-              <a:t>Case study, Review example of FRED and MaarjAM networks - how you found the data, wed them. Generalizable for other efforts? […] </a:t>
-            </a:r>
-            <a:r>
-              <a:rPr sz="2000" baseline="30000">
-                <a:hlinkClick r:id="rId2" action="ppaction://hlinksldjump"/>
+              <a:rPr>
+                <a:hlinkClick r:id="rId2"/>
               </a:rPr>
-              <a:t>1</a:t>
+              <a:t>https://creativecommons.org/licenses/by/4.0/</a:t>
             </a:r>
           </a:p>
         </p:txBody>
@@ -4252,7 +4328,7 @@
             </a:pPr>
             <a:r>
               <a:rPr/>
-              <a:t>Are we unsiloed yet? Revisiting MN^N Theme and Grand Challenge.</a:t>
+              <a:t>Guiding Questions</a:t>
             </a:r>
           </a:p>
         </p:txBody>
@@ -4272,30 +4348,55 @@
           <a:bodyPr/>
           <a:lstStyle/>
           <a:p>
-            <a:pPr lvl="0" indent="0" marL="1270000">
+            <a:pPr lvl="0" indent="0" marL="0">
+              <a:spcBef>
+                <a:spcPts val="3000"/>
+              </a:spcBef>
               <a:buNone/>
             </a:pPr>
             <a:r>
-              <a:rPr sz="2000"/>
-              <a:t>[…] MICROBENet^Net </a:t>
-            </a:r>
-            <a:r>
-              <a:rPr sz="2000" baseline="30000">
-                <a:hlinkClick r:id="rId2" action="ppaction://hlinksldjump"/>
-              </a:rPr>
-              <a:t>2</a:t>
-            </a:r>
-            <a:r>
-              <a:rPr sz="2000"/>
-              <a:t>[1] Theme and Grand Challenge: Plants and microorganisms regulate a diverse array of processes that modulate the Earth system. Yet, we know remarkably little about how variable plant-microbial interactions are across the globe, how microbial connections with plants respond to global change, and if changes in plant-microbe interactions will lead to predictable changes in plant, ecosystem, and macro-scale ecology. While microbial ecologists and plant ecologists both explore questions about geography, interactions, and function, this work has often occurred in plant or microbial silos. </a:t>
-            </a:r>
-            <a:r>
-              <a:rPr sz="2000" b="1"/>
-              <a:t>Focusing on either plants or microbes resulted in the development of distinct disciplinary vocabularies and meanings, even when using similar tools and asking questions across similar scales.</a:t>
-            </a:r>
-            <a:r>
-              <a:rPr sz="2000"/>
-              <a:t> […]</a:t>
+              <a:rPr b="1"/>
+              <a:t>Hey, are we unsiloed yet?</a:t>
+            </a:r>
+          </a:p>
+          <a:p>
+            <a:pPr lvl="0" indent="0" marL="0">
+              <a:spcBef>
+                <a:spcPts val="3000"/>
+              </a:spcBef>
+              <a:buNone/>
+            </a:pPr>
+            <a:r>
+              <a:rPr b="1"/>
+              <a:t>Do </a:t>
+            </a:r>
+            <a:r>
+              <a:rPr b="1" i="1"/>
+              <a:t>you</a:t>
+            </a:r>
+            <a:r>
+              <a:rPr b="1"/>
+              <a:t> have examples of unsilo-ing?</a:t>
+            </a:r>
+          </a:p>
+          <a:p>
+            <a:pPr lvl="0" indent="0" marL="0">
+              <a:spcBef>
+                <a:spcPts val="3000"/>
+              </a:spcBef>
+              <a:buNone/>
+            </a:pPr>
+            <a:r>
+              <a:rPr b="1"/>
+              <a:t>How do </a:t>
+            </a:r>
+            <a:r>
+              <a:rPr b="1" i="1"/>
+              <a:t>you</a:t>
+            </a:r>
+            <a:r>
+              <a:rPr b="1"/>
+              <a:t> think we should unsilo?</a:t>
             </a:r>
           </a:p>
         </p:txBody>
@@ -4306,6 +4407,201 @@
 </file>
 
 <file path=ppt/slides/slide5.xml><?xml version="1.0" encoding="utf-8"?>
+<p:sld xmlns:a="http://schemas.openxmlformats.org/drawingml/2006/main" xmlns:r="http://schemas.openxmlformats.org/officeDocument/2006/relationships" xmlns:p="http://schemas.openxmlformats.org/presentationml/2006/main">
+  <p:cSld>
+    <p:spTree>
+      <p:nvGrpSpPr>
+        <p:cNvPr id="1" name=""/>
+        <p:cNvGrpSpPr/>
+        <p:nvPr/>
+      </p:nvGrpSpPr>
+      <p:grpSpPr>
+        <a:xfrm>
+          <a:off x="0" y="0"/>
+          <a:ext cx="0" cy="0"/>
+          <a:chOff x="0" y="0"/>
+          <a:chExt cx="0" cy="0"/>
+        </a:xfrm>
+      </p:grpSpPr>
+      <p:sp>
+        <p:nvSpPr>
+          <p:cNvPr id="2" name="Title 1"/>
+          <p:cNvSpPr>
+            <a:spLocks noGrp="1"/>
+          </p:cNvSpPr>
+          <p:nvPr>
+            <p:ph type="title"/>
+          </p:nvPr>
+        </p:nvSpPr>
+        <p:spPr/>
+        <p:txBody>
+          <a:bodyPr/>
+          <a:lstStyle/>
+          <a:p>
+            <a:pPr lvl="0" indent="0" marL="0">
+              <a:buNone/>
+            </a:pPr>
+            <a:r>
+              <a:rPr/>
+              <a:t>Ben’s Challenge to Jorrit</a:t>
+            </a:r>
+          </a:p>
+        </p:txBody>
+      </p:sp>
+      <p:sp>
+        <p:nvSpPr>
+          <p:cNvPr id="3" name="Content Placeholder 2"/>
+          <p:cNvSpPr>
+            <a:spLocks noGrp="1"/>
+          </p:cNvSpPr>
+          <p:nvPr>
+            <p:ph idx="1"/>
+          </p:nvPr>
+        </p:nvSpPr>
+        <p:spPr/>
+        <p:txBody>
+          <a:bodyPr/>
+          <a:lstStyle/>
+          <a:p>
+            <a:pPr lvl="0" indent="0" marL="1270000">
+              <a:buNone/>
+            </a:pPr>
+            <a:r>
+              <a:rPr sz="2000"/>
+              <a:t>[…] New Datasets/Nodes/Networks that might be connected (Jorrit)</a:t>
+            </a:r>
+          </a:p>
+          <a:p>
+            <a:pPr lvl="0" indent="-342900" marL="342900">
+              <a:buAutoNum type="arabicPeriod"/>
+            </a:pPr>
+            <a:r>
+              <a:rPr sz="2000"/>
+              <a:t>What data are there (plain language summaries)?</a:t>
+            </a:r>
+          </a:p>
+          <a:p>
+            <a:pPr lvl="0" indent="-342900" marL="342900">
+              <a:buAutoNum type="arabicPeriod"/>
+            </a:pPr>
+            <a:r>
+              <a:rPr sz="2000"/>
+              <a:t>How can people access what are there?</a:t>
+            </a:r>
+          </a:p>
+          <a:p>
+            <a:pPr lvl="0" indent="-342900" marL="342900">
+              <a:buAutoNum type="arabicPeriod"/>
+            </a:pPr>
+            <a:r>
+              <a:rPr sz="2000"/>
+              <a:t>Case study, Review example of FRED and MaarjAM networks - how you found the data, wed them. Generalizable for other efforts? […] </a:t>
+            </a:r>
+            <a:r>
+              <a:rPr sz="2000" baseline="30000">
+                <a:hlinkClick r:id="rId2" action="ppaction://hlinksldjump"/>
+              </a:rPr>
+              <a:t>1</a:t>
+            </a:r>
+          </a:p>
+        </p:txBody>
+      </p:sp>
+    </p:spTree>
+  </p:cSld>
+</p:sld>
+</file>
+
+<file path=ppt/slides/slide6.xml><?xml version="1.0" encoding="utf-8"?>
+<p:sld xmlns:a="http://schemas.openxmlformats.org/drawingml/2006/main" xmlns:r="http://schemas.openxmlformats.org/officeDocument/2006/relationships" xmlns:p="http://schemas.openxmlformats.org/presentationml/2006/main">
+  <p:cSld>
+    <p:spTree>
+      <p:nvGrpSpPr>
+        <p:cNvPr id="1" name=""/>
+        <p:cNvGrpSpPr/>
+        <p:nvPr/>
+      </p:nvGrpSpPr>
+      <p:grpSpPr>
+        <a:xfrm>
+          <a:off x="0" y="0"/>
+          <a:ext cx="0" cy="0"/>
+          <a:chOff x="0" y="0"/>
+          <a:chExt cx="0" cy="0"/>
+        </a:xfrm>
+      </p:grpSpPr>
+      <p:sp>
+        <p:nvSpPr>
+          <p:cNvPr id="2" name="Title 1"/>
+          <p:cNvSpPr>
+            <a:spLocks noGrp="1"/>
+          </p:cNvSpPr>
+          <p:nvPr>
+            <p:ph type="title"/>
+          </p:nvPr>
+        </p:nvSpPr>
+        <p:spPr/>
+        <p:txBody>
+          <a:bodyPr/>
+          <a:lstStyle/>
+          <a:p>
+            <a:pPr lvl="0" indent="0" marL="0">
+              <a:buNone/>
+            </a:pPr>
+            <a:r>
+              <a:rPr/>
+              <a:t>Are we unsiloed yet? Revisiting MN^N Theme and Grand Challenge.</a:t>
+            </a:r>
+          </a:p>
+        </p:txBody>
+      </p:sp>
+      <p:sp>
+        <p:nvSpPr>
+          <p:cNvPr id="3" name="Content Placeholder 2"/>
+          <p:cNvSpPr>
+            <a:spLocks noGrp="1"/>
+          </p:cNvSpPr>
+          <p:nvPr>
+            <p:ph idx="1"/>
+          </p:nvPr>
+        </p:nvSpPr>
+        <p:spPr/>
+        <p:txBody>
+          <a:bodyPr/>
+          <a:lstStyle/>
+          <a:p>
+            <a:pPr lvl="0" indent="0" marL="1270000">
+              <a:buNone/>
+            </a:pPr>
+            <a:r>
+              <a:rPr sz="2000"/>
+              <a:t>[…] MICROBENet^Net </a:t>
+            </a:r>
+            <a:r>
+              <a:rPr sz="2000" baseline="30000">
+                <a:hlinkClick r:id="rId2" action="ppaction://hlinksldjump"/>
+              </a:rPr>
+              <a:t>2</a:t>
+            </a:r>
+            <a:r>
+              <a:rPr sz="2000"/>
+              <a:t>[1] Theme and Grand Challenge: Plants and microorganisms regulate a diverse array of processes that modulate the Earth system. Yet, we know remarkably little about how variable plant-microbial interactions are across the globe, how microbial connections with plants respond to global change, and if changes in plant-microbe interactions will lead to predictable changes in plant, ecosystem, and macro-scale ecology. While microbial ecologists and plant ecologists both explore questions about geography, interactions, and function, this work has often occurred in plant or microbial silos. </a:t>
+            </a:r>
+            <a:r>
+              <a:rPr sz="2000" b="1"/>
+              <a:t>Focusing on either plants or microbes resulted in the development of distinct disciplinary vocabularies and meanings, even when using similar tools and asking questions across similar scales.</a:t>
+            </a:r>
+            <a:r>
+              <a:rPr sz="2000"/>
+              <a:t> […]</a:t>
+            </a:r>
+          </a:p>
+        </p:txBody>
+      </p:sp>
+    </p:spTree>
+  </p:cSld>
+</p:sld>
+</file>
+
+<file path=ppt/slides/slide7.xml><?xml version="1.0" encoding="utf-8"?>
 <p:sld xmlns:a="http://schemas.openxmlformats.org/drawingml/2006/main" xmlns:r="http://schemas.openxmlformats.org/officeDocument/2006/relationships" xmlns:p="http://schemas.openxmlformats.org/presentationml/2006/main">
   <p:cSld>
     <p:spTree>
@@ -4412,7 +4708,7 @@
 </p:sld>
 </file>
 
-<file path=ppt/slides/slide6.xml><?xml version="1.0" encoding="utf-8"?>
+<file path=ppt/slides/slide8.xml><?xml version="1.0" encoding="utf-8"?>
 <p:sld xmlns:a="http://schemas.openxmlformats.org/drawingml/2006/main" xmlns:r="http://schemas.openxmlformats.org/officeDocument/2006/relationships" xmlns:p="http://schemas.openxmlformats.org/presentationml/2006/main">
   <p:cSld>
     <p:spTree>
@@ -4469,7 +4765,7 @@
 </p:sld>
 </file>
 
-<file path=ppt/slides/slide7.xml><?xml version="1.0" encoding="utf-8"?>
+<file path=ppt/slides/slide9.xml><?xml version="1.0" encoding="utf-8"?>
 <p:sld xmlns:a="http://schemas.openxmlformats.org/drawingml/2006/main" xmlns:r="http://schemas.openxmlformats.org/officeDocument/2006/relationships" xmlns:p="http://schemas.openxmlformats.org/presentationml/2006/main">
   <p:cSld>
     <p:spTree>
@@ -4567,199 +4863,6 @@
             <a:r>
               <a:rPr/>
               <a:t>Among many others, FRED and MaarjAM meet in Knoxville, TN in 2025</a:t>
-            </a:r>
-          </a:p>
-        </p:txBody>
-      </p:sp>
-    </p:spTree>
-  </p:cSld>
-</p:sld>
-</file>
-
-<file path=ppt/slides/slide8.xml><?xml version="1.0" encoding="utf-8"?>
-<p:sld xmlns:a="http://schemas.openxmlformats.org/drawingml/2006/main" xmlns:r="http://schemas.openxmlformats.org/officeDocument/2006/relationships" xmlns:p="http://schemas.openxmlformats.org/presentationml/2006/main">
-  <p:cSld>
-    <p:spTree>
-      <p:nvGrpSpPr>
-        <p:cNvPr id="1" name=""/>
-        <p:cNvGrpSpPr/>
-        <p:nvPr/>
-      </p:nvGrpSpPr>
-      <p:grpSpPr>
-        <a:xfrm>
-          <a:off x="0" y="0"/>
-          <a:ext cx="0" cy="0"/>
-          <a:chOff x="0" y="0"/>
-          <a:chExt cx="0" cy="0"/>
-        </a:xfrm>
-      </p:grpSpPr>
-      <p:sp>
-        <p:nvSpPr>
-          <p:cNvPr id="3" name="Content Placeholder 2"/>
-          <p:cNvSpPr>
-            <a:spLocks noGrp="1"/>
-          </p:cNvSpPr>
-          <p:nvPr>
-            <p:ph idx="1"/>
-          </p:nvPr>
-        </p:nvSpPr>
-        <p:spPr/>
-        <p:txBody>
-          <a:bodyPr/>
-          <a:lstStyle/>
-          <a:p>
-            <a:pPr lvl="0" indent="0" marL="0">
-              <a:buNone/>
-            </a:pPr>
-            <a:r>
-              <a:rPr/>
-              <a:t> </a:t>
-            </a:r>
-            <a:r>
-              <a:rPr baseline="30000">
-                <a:hlinkClick r:id="rId2" action="ppaction://hlinksldjump"/>
-              </a:rPr>
-              <a:t>4</a:t>
-            </a:r>
-            <a:r>
-              <a:rPr/>
-              <a:t>.</a:t>
-            </a:r>
-          </a:p>
-        </p:txBody>
-      </p:sp>
-    </p:spTree>
-  </p:cSld>
-</p:sld>
-</file>
-
-<file path=ppt/slides/slide9.xml><?xml version="1.0" encoding="utf-8"?>
-<p:sld xmlns:a="http://schemas.openxmlformats.org/drawingml/2006/main" xmlns:r="http://schemas.openxmlformats.org/officeDocument/2006/relationships" xmlns:p="http://schemas.openxmlformats.org/presentationml/2006/main">
-  <p:cSld>
-    <p:spTree>
-      <p:nvGrpSpPr>
-        <p:cNvPr id="1" name=""/>
-        <p:cNvGrpSpPr/>
-        <p:nvPr/>
-      </p:nvGrpSpPr>
-      <p:grpSpPr>
-        <a:xfrm>
-          <a:off x="0" y="0"/>
-          <a:ext cx="0" cy="0"/>
-          <a:chOff x="0" y="0"/>
-          <a:chExt cx="0" cy="0"/>
-        </a:xfrm>
-      </p:grpSpPr>
-      <p:sp>
-        <p:nvSpPr>
-          <p:cNvPr id="2" name="Title 1"/>
-          <p:cNvSpPr>
-            <a:spLocks noGrp="1"/>
-          </p:cNvSpPr>
-          <p:nvPr>
-            <p:ph type="title"/>
-          </p:nvPr>
-        </p:nvSpPr>
-        <p:spPr/>
-        <p:txBody>
-          <a:bodyPr/>
-          <a:lstStyle/>
-          <a:p>
-            <a:pPr lvl="0" indent="0" marL="0">
-              <a:buNone/>
-            </a:pPr>
-            <a:r>
-              <a:rPr/>
-              <a:t>Are we unsiloed yet? FRED and MaarjAM</a:t>
-            </a:r>
-          </a:p>
-        </p:txBody>
-      </p:sp>
-      <p:sp>
-        <p:nvSpPr>
-          <p:cNvPr id="3" name="Content Placeholder 2"/>
-          <p:cNvSpPr>
-            <a:spLocks noGrp="1"/>
-          </p:cNvSpPr>
-          <p:nvPr>
-            <p:ph idx="1"/>
-          </p:nvPr>
-        </p:nvSpPr>
-        <p:spPr/>
-        <p:txBody>
-          <a:bodyPr/>
-          <a:lstStyle/>
-          <a:p>
-            <a:pPr lvl="0"/>
-            <a:r>
-              <a:rPr/>
-              <a:t>FRED/MaarjAM met in person and data (csv, xslx-&gt;csv) was shared in person</a:t>
-            </a:r>
-          </a:p>
-          <a:p>
-            <a:pPr lvl="0"/>
-            <a:r>
-              <a:rPr/>
-              <a:t>FRED/MaarjAM data openly published</a:t>
-            </a:r>
-          </a:p>
-          <a:p>
-            <a:pPr lvl="1"/>
-            <a:r>
-              <a:rPr>
-                <a:hlinkClick r:id="rId2"/>
-              </a:rPr>
-              <a:t>https://github.com/globalbioticinteractions/fred</a:t>
-            </a:r>
-          </a:p>
-          <a:p>
-            <a:pPr lvl="1"/>
-            <a:r>
-              <a:rPr>
-                <a:hlinkClick r:id="rId3"/>
-              </a:rPr>
-              <a:t>https://github.com/globalbioticinteractions/maarjam</a:t>
-            </a:r>
-          </a:p>
-          <a:p>
-            <a:pPr lvl="0"/>
-            <a:r>
-              <a:rPr/>
-              <a:t>GloBI integration tools used to connect FRED/MaarjAM via plant taxonomic names (World of Flora Online)</a:t>
-            </a:r>
-          </a:p>
-          <a:p>
-            <a:pPr lvl="0"/>
-            <a:r>
-              <a:rPr/>
-              <a:t>Early applications include GloBI Data Reviews and Plant Overlap Analysis.</a:t>
-            </a:r>
-          </a:p>
-          <a:p>
-            <a:pPr lvl="1"/>
-            <a:r>
-              <a:rPr>
-                <a:hlinkClick r:id="rId4"/>
-              </a:rPr>
-              <a:t>Elton, Nomer, &amp; Preston. (2026). Versioned Archive and Review of Biotic Interactions and Taxon Names Found within globalbioticinteractions/fred hash://md5/6db551793883f575d828d8a600e1af72. Zenodo. https://doi.org/10.5281/zenodo.20547776</a:t>
-            </a:r>
-          </a:p>
-          <a:p>
-            <a:pPr lvl="1"/>
-            <a:r>
-              <a:rPr>
-                <a:hlinkClick r:id="rId5"/>
-              </a:rPr>
-              <a:t>Elton, Nomer, &amp; Preston. (2026). Versioned Archive and Review of Biotic Interactions and Taxon Names Found within globalbioticinteractions/maarjam hash://md5/4578fcd83fceba1f11c269d8aaf1118a. Zenodo. https://doi.org/10.5281/zenodo.20548434</a:t>
-            </a:r>
-          </a:p>
-          <a:p>
-            <a:pPr lvl="1"/>
-            <a:r>
-              <a:rPr>
-                <a:hlinkClick r:id="rId6"/>
-              </a:rPr>
-              <a:t>https://github.com/jhpoelen/fungal-plant-host-overlap/tree/0faeeeae123b5d8f53576feb1d607ffb5d2bd3ac</a:t>
             </a:r>
           </a:p>
         </p:txBody>

--- a/slides.pptx
+++ b/slides.pptx
@@ -3133,7 +3133,7 @@
             </a:pPr>
             <a:r>
               <a:rPr/>
-              <a:t>MicrobeNetNet - Connecting Datasets/Nodes/Networks Across Disciplinary Siloes</a:t>
+              <a:t>MicrobeNetNet - Connecting Datasets/Nodes/Networks Across Disciplinary Silos</a:t>
             </a:r>
           </a:p>
         </p:txBody>
